--- a/rapports/septembre/Smartphone_ID_sept2026.pptx
+++ b/rapports/septembre/Smartphone_ID_sept2026.pptx
@@ -5283,22 +5283,13 @@
               </a:spcAft>
             </a:pPr>
             <a:r>
-              <a:rPr sz="1800" b="1" i="0">
-                <a:solidFill>
-                  <a:srgbClr val="EE6A2C"/>
-                </a:solidFill>
-                <a:latin typeface="Arial"/>
-              </a:rPr>
-              <a:t>reconditionné</a:t>
-            </a:r>
-            <a:r>
               <a:rPr sz="1600" b="1" i="0">
                 <a:solidFill>
-                  <a:srgbClr val="111111"/>
-                </a:solidFill>
-                <a:latin typeface="Arial"/>
-              </a:rPr>
-              <a:t>   iPhone 15</a:t>
+                  <a:srgbClr val="555B66"/>
+                </a:solidFill>
+                <a:latin typeface="Arial"/>
+              </a:rPr>
+              <a:t>À compléter</a:t>
             </a:r>
           </a:p>
           <a:p>
@@ -5308,22 +5299,13 @@
               </a:spcAft>
             </a:pPr>
             <a:r>
-              <a:rPr sz="1500" b="1" i="0">
+              <a:rPr sz="1100" b="0" i="0">
                 <a:solidFill>
                   <a:srgbClr val="555B66"/>
                 </a:solidFill>
                 <a:latin typeface="Arial"/>
               </a:rPr>
-              <a:t>fiabilité</a:t>
-            </a:r>
-            <a:r>
-              <a:rPr sz="1400" b="1" i="0">
-                <a:solidFill>
-                  <a:srgbClr val="111111"/>
-                </a:solidFill>
-                <a:latin typeface="Arial"/>
-              </a:rPr>
-              <a:t>   Galaxy S25</a:t>
+              <a:t>Rapport d'insights de septembre</a:t>
             </a:r>
           </a:p>
           <a:p>
@@ -5333,106 +5315,13 @@
               </a:spcAft>
             </a:pPr>
             <a:r>
-              <a:rPr sz="1300" b="1" i="0">
-                <a:solidFill>
-                  <a:srgbClr val="EE6A2C"/>
-                </a:solidFill>
-                <a:latin typeface="Arial"/>
-              </a:rPr>
-              <a:t>remplacement après panne</a:t>
-            </a:r>
-          </a:p>
-          <a:p>
-            <a:pPr algn="l">
-              <a:spcAft>
-                <a:spcPts val="500"/>
-              </a:spcAft>
-            </a:pPr>
-            <a:r>
-              <a:rPr sz="1100" b="1" i="0">
-                <a:solidFill>
-                  <a:srgbClr val="EE6A2C"/>
-                </a:solidFill>
-                <a:latin typeface="Arial"/>
-              </a:rPr>
-              <a:t>256 Go</a:t>
-            </a:r>
-            <a:r>
-              <a:rPr sz="1100" b="1" i="0">
-                <a:solidFill>
-                  <a:srgbClr val="111111"/>
-                </a:solidFill>
-                <a:latin typeface="Arial"/>
-              </a:rPr>
-              <a:t>   prix</a:t>
-            </a:r>
-            <a:r>
               <a:rPr sz="1100" b="0" i="0">
                 <a:solidFill>
                   <a:srgbClr val="555B66"/>
                 </a:solidFill>
                 <a:latin typeface="Arial"/>
               </a:rPr>
-              <a:t>   garantie</a:t>
-            </a:r>
-          </a:p>
-          <a:p>
-            <a:pPr algn="l">
-              <a:spcAft>
-                <a:spcPts val="500"/>
-              </a:spcAft>
-            </a:pPr>
-            <a:r>
-              <a:rPr sz="1100" b="1" i="0">
-                <a:solidFill>
-                  <a:srgbClr val="111111"/>
-                </a:solidFill>
-                <a:latin typeface="Arial"/>
-              </a:rPr>
-              <a:t>Back Market</a:t>
-            </a:r>
-            <a:r>
-              <a:rPr sz="1100" b="0" i="0">
-                <a:solidFill>
-                  <a:srgbClr val="555B66"/>
-                </a:solidFill>
-                <a:latin typeface="Arial"/>
-              </a:rPr>
-              <a:t>   Amazon</a:t>
-            </a:r>
-            <a:r>
-              <a:rPr sz="1100" b="1" i="0">
-                <a:solidFill>
-                  <a:srgbClr val="EE6A2C"/>
-                </a:solidFill>
-                <a:latin typeface="Arial"/>
-              </a:rPr>
-              <a:t>   Cdiscount</a:t>
-            </a:r>
-          </a:p>
-          <a:p>
-            <a:pPr algn="l">
-              <a:spcAft>
-                <a:spcPts val="500"/>
-              </a:spcAft>
-            </a:pPr>
-            <a:r>
-              <a:rPr sz="1100" b="1" i="0">
-                <a:solidFill>
-                  <a:srgbClr val="111111"/>
-                </a:solidFill>
-                <a:latin typeface="Arial"/>
-              </a:rPr>
-              <a:t>promotion</a:t>
-            </a:r>
-            <a:r>
-              <a:rPr sz="1100" b="0" i="0">
-                <a:solidFill>
-                  <a:srgbClr val="555B66"/>
-                </a:solidFill>
-                <a:latin typeface="Arial"/>
-              </a:rPr>
-              <a:t>   compatibilité</a:t>
+              <a:t>hors sujet (smartphones reconditionnés)</a:t>
             </a:r>
           </a:p>
         </p:txBody>
@@ -5616,470 +5505,14 @@
                 </a:solidFill>
                 <a:latin typeface="Arial"/>
               </a:rPr>
-              <a:t>Comment je sais si un iPhone 15 reconditionné est fiable ?</a:t>
-            </a:r>
-          </a:p>
-        </p:txBody>
-      </p:sp>
-      <p:sp>
-        <p:nvSpPr>
-          <p:cNvPr id="65" name="Rectangle 64"/>
-          <p:cNvSpPr/>
-          <p:nvPr/>
-        </p:nvSpPr>
-        <p:spPr>
-          <a:xfrm>
-            <a:off x="4437888" y="4632960"/>
-            <a:ext cx="2913888" cy="304800"/>
-          </a:xfrm>
-          <a:prstGeom prst="rect">
-            <a:avLst/>
-          </a:prstGeom>
-          <a:solidFill>
-            <a:srgbClr val="F1EFEA"/>
-          </a:solidFill>
-          <a:ln>
-            <a:noFill/>
-          </a:ln>
-          <a:effectLst/>
-        </p:spPr>
-        <p:style>
-          <a:lnRef idx="1">
-            <a:schemeClr val="accent1"/>
-          </a:lnRef>
-          <a:fillRef idx="3">
-            <a:schemeClr val="accent1"/>
-          </a:fillRef>
-          <a:effectRef idx="2">
-            <a:schemeClr val="accent1"/>
-          </a:effectRef>
-          <a:fontRef idx="minor">
-            <a:schemeClr val="lt1"/>
-          </a:fontRef>
-        </p:style>
-        <p:txBody>
-          <a:bodyPr rtlCol="0" anchor="ctr"/>
-          <a:lstStyle/>
-          <a:p>
-            <a:pPr algn="ctr"/>
-          </a:p>
-        </p:txBody>
-      </p:sp>
-      <p:sp>
-        <p:nvSpPr>
-          <p:cNvPr id="66" name="TextBox 65"/>
-          <p:cNvSpPr txBox="1"/>
-          <p:nvPr/>
-        </p:nvSpPr>
-        <p:spPr>
-          <a:xfrm>
-            <a:off x="4559808" y="4632960"/>
-            <a:ext cx="182880" cy="304800"/>
-          </a:xfrm>
-          <a:prstGeom prst="rect">
-            <a:avLst/>
-          </a:prstGeom>
-          <a:noFill/>
-        </p:spPr>
-        <p:txBody>
-          <a:bodyPr wrap="square" anchor="ctr" lIns="0" rIns="0" tIns="0" bIns="0">
-            <a:spAutoFit/>
-          </a:bodyPr>
-          <a:lstStyle/>
-          <a:p>
-            <a:pPr algn="l"/>
-            <a:r>
-              <a:rPr sz="900" b="0" i="0">
-                <a:solidFill>
-                  <a:srgbClr val="555B66"/>
-                </a:solidFill>
-                <a:latin typeface="Arial"/>
-              </a:rPr>
-              <a:t>🔍</a:t>
-            </a:r>
-          </a:p>
-        </p:txBody>
-      </p:sp>
-      <p:sp>
-        <p:nvSpPr>
-          <p:cNvPr id="67" name="TextBox 66"/>
-          <p:cNvSpPr txBox="1"/>
-          <p:nvPr/>
-        </p:nvSpPr>
-        <p:spPr>
-          <a:xfrm>
-            <a:off x="4791456" y="4632960"/>
-            <a:ext cx="2499360" cy="304800"/>
-          </a:xfrm>
-          <a:prstGeom prst="rect">
-            <a:avLst/>
-          </a:prstGeom>
-          <a:noFill/>
-        </p:spPr>
-        <p:txBody>
-          <a:bodyPr wrap="square" anchor="ctr" lIns="0" rIns="0" tIns="0" bIns="0">
-            <a:spAutoFit/>
-          </a:bodyPr>
-          <a:lstStyle/>
-          <a:p>
-            <a:pPr algn="l"/>
-            <a:r>
-              <a:rPr sz="900" b="0" i="0">
-                <a:solidFill>
-                  <a:srgbClr val="111111"/>
-                </a:solidFill>
-                <a:latin typeface="Arial"/>
-              </a:rPr>
-              <a:t>Montre-moi les smartphones Android 256 Go sous 500 €</a:t>
-            </a:r>
-          </a:p>
-        </p:txBody>
-      </p:sp>
-      <p:sp>
-        <p:nvSpPr>
-          <p:cNvPr id="68" name="Rectangle 67"/>
-          <p:cNvSpPr/>
-          <p:nvPr/>
-        </p:nvSpPr>
-        <p:spPr>
-          <a:xfrm>
-            <a:off x="4437888" y="4998720"/>
-            <a:ext cx="2913888" cy="304800"/>
-          </a:xfrm>
-          <a:prstGeom prst="rect">
-            <a:avLst/>
-          </a:prstGeom>
-          <a:solidFill>
-            <a:srgbClr val="F1EFEA"/>
-          </a:solidFill>
-          <a:ln>
-            <a:noFill/>
-          </a:ln>
-          <a:effectLst/>
-        </p:spPr>
-        <p:style>
-          <a:lnRef idx="1">
-            <a:schemeClr val="accent1"/>
-          </a:lnRef>
-          <a:fillRef idx="3">
-            <a:schemeClr val="accent1"/>
-          </a:fillRef>
-          <a:effectRef idx="2">
-            <a:schemeClr val="accent1"/>
-          </a:effectRef>
-          <a:fontRef idx="minor">
-            <a:schemeClr val="lt1"/>
-          </a:fontRef>
-        </p:style>
-        <p:txBody>
-          <a:bodyPr rtlCol="0" anchor="ctr"/>
-          <a:lstStyle/>
-          <a:p>
-            <a:pPr algn="ctr"/>
-          </a:p>
-        </p:txBody>
-      </p:sp>
-      <p:sp>
-        <p:nvSpPr>
-          <p:cNvPr id="69" name="TextBox 68"/>
-          <p:cNvSpPr txBox="1"/>
-          <p:nvPr/>
-        </p:nvSpPr>
-        <p:spPr>
-          <a:xfrm>
-            <a:off x="4559808" y="4998720"/>
-            <a:ext cx="182880" cy="304800"/>
-          </a:xfrm>
-          <a:prstGeom prst="rect">
-            <a:avLst/>
-          </a:prstGeom>
-          <a:noFill/>
-        </p:spPr>
-        <p:txBody>
-          <a:bodyPr wrap="square" anchor="ctr" lIns="0" rIns="0" tIns="0" bIns="0">
-            <a:spAutoFit/>
-          </a:bodyPr>
-          <a:lstStyle/>
-          <a:p>
-            <a:pPr algn="l"/>
-            <a:r>
-              <a:rPr sz="900" b="0" i="0">
-                <a:solidFill>
-                  <a:srgbClr val="555B66"/>
-                </a:solidFill>
-                <a:latin typeface="Arial"/>
-              </a:rPr>
-              <a:t>🔍</a:t>
-            </a:r>
-          </a:p>
-        </p:txBody>
-      </p:sp>
-      <p:sp>
-        <p:nvSpPr>
-          <p:cNvPr id="70" name="TextBox 69"/>
-          <p:cNvSpPr txBox="1"/>
-          <p:nvPr/>
-        </p:nvSpPr>
-        <p:spPr>
-          <a:xfrm>
-            <a:off x="4791456" y="4998720"/>
-            <a:ext cx="2499360" cy="304800"/>
-          </a:xfrm>
-          <a:prstGeom prst="rect">
-            <a:avLst/>
-          </a:prstGeom>
-          <a:noFill/>
-        </p:spPr>
-        <p:txBody>
-          <a:bodyPr wrap="square" anchor="ctr" lIns="0" rIns="0" tIns="0" bIns="0">
-            <a:spAutoFit/>
-          </a:bodyPr>
-          <a:lstStyle/>
-          <a:p>
-            <a:pPr algn="l"/>
-            <a:r>
-              <a:rPr sz="900" b="0" i="0">
-                <a:solidFill>
-                  <a:srgbClr val="111111"/>
-                </a:solidFill>
-                <a:latin typeface="Arial"/>
-              </a:rPr>
-              <a:t>Ça vaut le coup de changer de smartphone juste pour WhatsApp ?</a:t>
-            </a:r>
-          </a:p>
-        </p:txBody>
-      </p:sp>
-      <p:sp>
-        <p:nvSpPr>
-          <p:cNvPr id="71" name="Rectangle 70"/>
-          <p:cNvSpPr/>
-          <p:nvPr/>
-        </p:nvSpPr>
-        <p:spPr>
-          <a:xfrm>
-            <a:off x="4437888" y="5364480"/>
-            <a:ext cx="2913888" cy="304800"/>
-          </a:xfrm>
-          <a:prstGeom prst="rect">
-            <a:avLst/>
-          </a:prstGeom>
-          <a:solidFill>
-            <a:srgbClr val="F1EFEA"/>
-          </a:solidFill>
-          <a:ln>
-            <a:noFill/>
-          </a:ln>
-          <a:effectLst/>
-        </p:spPr>
-        <p:style>
-          <a:lnRef idx="1">
-            <a:schemeClr val="accent1"/>
-          </a:lnRef>
-          <a:fillRef idx="3">
-            <a:schemeClr val="accent1"/>
-          </a:fillRef>
-          <a:effectRef idx="2">
-            <a:schemeClr val="accent1"/>
-          </a:effectRef>
-          <a:fontRef idx="minor">
-            <a:schemeClr val="lt1"/>
-          </a:fontRef>
-        </p:style>
-        <p:txBody>
-          <a:bodyPr rtlCol="0" anchor="ctr"/>
-          <a:lstStyle/>
-          <a:p>
-            <a:pPr algn="ctr"/>
-          </a:p>
-        </p:txBody>
-      </p:sp>
-      <p:sp>
-        <p:nvSpPr>
-          <p:cNvPr id="72" name="TextBox 71"/>
-          <p:cNvSpPr txBox="1"/>
-          <p:nvPr/>
-        </p:nvSpPr>
-        <p:spPr>
-          <a:xfrm>
-            <a:off x="4559808" y="5364480"/>
-            <a:ext cx="182880" cy="304800"/>
-          </a:xfrm>
-          <a:prstGeom prst="rect">
-            <a:avLst/>
-          </a:prstGeom>
-          <a:noFill/>
-        </p:spPr>
-        <p:txBody>
-          <a:bodyPr wrap="square" anchor="ctr" lIns="0" rIns="0" tIns="0" bIns="0">
-            <a:spAutoFit/>
-          </a:bodyPr>
-          <a:lstStyle/>
-          <a:p>
-            <a:pPr algn="l"/>
-            <a:r>
-              <a:rPr sz="900" b="0" i="0">
-                <a:solidFill>
-                  <a:srgbClr val="555B66"/>
-                </a:solidFill>
-                <a:latin typeface="Arial"/>
-              </a:rPr>
-              <a:t>🔍</a:t>
-            </a:r>
-          </a:p>
-        </p:txBody>
-      </p:sp>
-      <p:sp>
-        <p:nvSpPr>
-          <p:cNvPr id="73" name="TextBox 72"/>
-          <p:cNvSpPr txBox="1"/>
-          <p:nvPr/>
-        </p:nvSpPr>
-        <p:spPr>
-          <a:xfrm>
-            <a:off x="4791456" y="5364480"/>
-            <a:ext cx="2499360" cy="304800"/>
-          </a:xfrm>
-          <a:prstGeom prst="rect">
-            <a:avLst/>
-          </a:prstGeom>
-          <a:noFill/>
-        </p:spPr>
-        <p:txBody>
-          <a:bodyPr wrap="square" anchor="ctr" lIns="0" rIns="0" tIns="0" bIns="0">
-            <a:spAutoFit/>
-          </a:bodyPr>
-          <a:lstStyle/>
-          <a:p>
-            <a:pPr algn="l"/>
-            <a:r>
-              <a:rPr sz="900" b="0" i="0">
-                <a:solidFill>
-                  <a:srgbClr val="111111"/>
-                </a:solidFill>
-                <a:latin typeface="Arial"/>
-              </a:rPr>
-              <a:t>Les Honor vendus en Europe ont-ils bien les services Google ?</a:t>
-            </a:r>
-          </a:p>
-        </p:txBody>
-      </p:sp>
-      <p:sp>
-        <p:nvSpPr>
-          <p:cNvPr id="74" name="Rectangle 73"/>
-          <p:cNvSpPr/>
-          <p:nvPr/>
-        </p:nvSpPr>
-        <p:spPr>
-          <a:xfrm>
-            <a:off x="4437888" y="5730240"/>
-            <a:ext cx="2913888" cy="304800"/>
-          </a:xfrm>
-          <a:prstGeom prst="rect">
-            <a:avLst/>
-          </a:prstGeom>
-          <a:solidFill>
-            <a:srgbClr val="F1EFEA"/>
-          </a:solidFill>
-          <a:ln>
-            <a:noFill/>
-          </a:ln>
-          <a:effectLst/>
-        </p:spPr>
-        <p:style>
-          <a:lnRef idx="1">
-            <a:schemeClr val="accent1"/>
-          </a:lnRef>
-          <a:fillRef idx="3">
-            <a:schemeClr val="accent1"/>
-          </a:fillRef>
-          <a:effectRef idx="2">
-            <a:schemeClr val="accent1"/>
-          </a:effectRef>
-          <a:fontRef idx="minor">
-            <a:schemeClr val="lt1"/>
-          </a:fontRef>
-        </p:style>
-        <p:txBody>
-          <a:bodyPr rtlCol="0" anchor="ctr"/>
-          <a:lstStyle/>
-          <a:p>
-            <a:pPr algn="ctr"/>
-          </a:p>
-        </p:txBody>
-      </p:sp>
-      <p:sp>
-        <p:nvSpPr>
-          <p:cNvPr id="75" name="TextBox 74"/>
-          <p:cNvSpPr txBox="1"/>
-          <p:nvPr/>
-        </p:nvSpPr>
-        <p:spPr>
-          <a:xfrm>
-            <a:off x="4559808" y="5730240"/>
-            <a:ext cx="182880" cy="304800"/>
-          </a:xfrm>
-          <a:prstGeom prst="rect">
-            <a:avLst/>
-          </a:prstGeom>
-          <a:noFill/>
-        </p:spPr>
-        <p:txBody>
-          <a:bodyPr wrap="square" anchor="ctr" lIns="0" rIns="0" tIns="0" bIns="0">
-            <a:spAutoFit/>
-          </a:bodyPr>
-          <a:lstStyle/>
-          <a:p>
-            <a:pPr algn="l"/>
-            <a:r>
-              <a:rPr sz="900" b="0" i="0">
-                <a:solidFill>
-                  <a:srgbClr val="555B66"/>
-                </a:solidFill>
-                <a:latin typeface="Arial"/>
-              </a:rPr>
-              <a:t>🔍</a:t>
-            </a:r>
-          </a:p>
-        </p:txBody>
-      </p:sp>
-      <p:sp>
-        <p:nvSpPr>
-          <p:cNvPr id="76" name="TextBox 75"/>
-          <p:cNvSpPr txBox="1"/>
-          <p:nvPr/>
-        </p:nvSpPr>
-        <p:spPr>
-          <a:xfrm>
-            <a:off x="4791456" y="5730240"/>
-            <a:ext cx="2499360" cy="304800"/>
-          </a:xfrm>
-          <a:prstGeom prst="rect">
-            <a:avLst/>
-          </a:prstGeom>
-          <a:noFill/>
-        </p:spPr>
-        <p:txBody>
-          <a:bodyPr wrap="square" anchor="ctr" lIns="0" rIns="0" tIns="0" bIns="0">
-            <a:spAutoFit/>
-          </a:bodyPr>
-          <a:lstStyle/>
-          <a:p>
-            <a:pPr algn="l"/>
-            <a:r>
-              <a:rPr sz="900" b="0" i="0">
-                <a:solidFill>
-                  <a:srgbClr val="111111"/>
-                </a:solidFill>
-                <a:latin typeface="Arial"/>
-              </a:rPr>
-              <a:t>Un autre modèle. Il reste trop cher</a:t>
-            </a:r>
-          </a:p>
-        </p:txBody>
-      </p:sp>
-      <p:sp>
-        <p:nvSpPr>
-          <p:cNvPr id="77" name="TextBox 76"/>
+              <a:t>À compléter : le rapport d'insights de septembre porte sur les smartphones reconditionnés, pas sur la photo d'identité</a:t>
+            </a:r>
+          </a:p>
+        </p:txBody>
+      </p:sp>
+      <p:sp>
+        <p:nvSpPr>
+          <p:cNvPr id="65" name="TextBox 64"/>
           <p:cNvSpPr txBox="1"/>
           <p:nvPr/>
         </p:nvSpPr>
@@ -6114,7 +5547,7 @@
       </p:sp>
       <p:sp>
         <p:nvSpPr>
-          <p:cNvPr id="78" name="TextBox 77"/>
+          <p:cNvPr id="66" name="TextBox 65"/>
           <p:cNvSpPr txBox="1"/>
           <p:nvPr/>
         </p:nvSpPr>
@@ -6149,7 +5582,7 @@
       </p:sp>
       <p:sp>
         <p:nvSpPr>
-          <p:cNvPr id="79" name="TextBox 78"/>
+          <p:cNvPr id="67" name="TextBox 66"/>
           <p:cNvSpPr txBox="1"/>
           <p:nvPr/>
         </p:nvSpPr>
@@ -6184,7 +5617,7 @@
       </p:sp>
       <p:sp>
         <p:nvSpPr>
-          <p:cNvPr id="80" name="Rectangle 79"/>
+          <p:cNvPr id="68" name="Rectangle 67"/>
           <p:cNvSpPr/>
           <p:nvPr/>
         </p:nvSpPr>
@@ -6228,14 +5661,14 @@
       </p:sp>
       <p:sp>
         <p:nvSpPr>
-          <p:cNvPr id="81" name="TextBox 80"/>
+          <p:cNvPr id="69" name="TextBox 68"/>
           <p:cNvSpPr txBox="1"/>
           <p:nvPr/>
         </p:nvSpPr>
         <p:spPr>
           <a:xfrm>
             <a:off x="8296656" y="4389120"/>
-            <a:ext cx="2072640" cy="152400"/>
+            <a:ext cx="2225040" cy="152400"/>
           </a:xfrm>
           <a:prstGeom prst="rect">
             <a:avLst/>
@@ -6256,14 +5689,14 @@
                 </a:solidFill>
                 <a:latin typeface="Arial"/>
               </a:rPr>
-              <a:t>Smartphones</a:t>
-            </a:r>
-          </a:p>
-        </p:txBody>
-      </p:sp>
-      <p:sp>
-        <p:nvSpPr>
-          <p:cNvPr id="82" name="Rectangle 81"/>
+              <a:t>Carte d'identité et passeport</a:t>
+            </a:r>
+          </a:p>
+        </p:txBody>
+      </p:sp>
+      <p:sp>
+        <p:nvSpPr>
+          <p:cNvPr id="70" name="Rectangle 69"/>
           <p:cNvSpPr/>
           <p:nvPr/>
         </p:nvSpPr>
@@ -6307,14 +5740,14 @@
       </p:sp>
       <p:sp>
         <p:nvSpPr>
-          <p:cNvPr id="83" name="TextBox 82"/>
+          <p:cNvPr id="71" name="TextBox 70"/>
           <p:cNvSpPr txBox="1"/>
           <p:nvPr/>
         </p:nvSpPr>
         <p:spPr>
           <a:xfrm>
             <a:off x="8296656" y="4657344"/>
-            <a:ext cx="2072640" cy="152400"/>
+            <a:ext cx="2225040" cy="152400"/>
           </a:xfrm>
           <a:prstGeom prst="rect">
             <a:avLst/>
@@ -6329,20 +5762,20 @@
           <a:p>
             <a:pPr algn="l"/>
             <a:r>
-              <a:rPr sz="1000" b="0" i="0">
+              <a:rPr sz="800" b="0" i="0">
                 <a:solidFill>
                   <a:srgbClr val="111111"/>
                 </a:solidFill>
                 <a:latin typeface="Arial"/>
               </a:rPr>
-              <a:t>Accessoires mobiles · 6 %</a:t>
-            </a:r>
-          </a:p>
-        </p:txBody>
-      </p:sp>
-      <p:sp>
-        <p:nvSpPr>
-          <p:cNvPr id="84" name="Rectangle 83"/>
+              <a:t>Permis de conduire et e-photo ANTS · 24 %</a:t>
+            </a:r>
+          </a:p>
+        </p:txBody>
+      </p:sp>
+      <p:sp>
+        <p:nvSpPr>
+          <p:cNvPr id="72" name="Rectangle 71"/>
           <p:cNvSpPr/>
           <p:nvPr/>
         </p:nvSpPr>
@@ -6386,14 +5819,14 @@
       </p:sp>
       <p:sp>
         <p:nvSpPr>
-          <p:cNvPr id="85" name="TextBox 84"/>
+          <p:cNvPr id="73" name="TextBox 72"/>
           <p:cNvSpPr txBox="1"/>
           <p:nvPr/>
         </p:nvSpPr>
         <p:spPr>
           <a:xfrm>
             <a:off x="8296656" y="4925568"/>
-            <a:ext cx="2072640" cy="152400"/>
+            <a:ext cx="2225040" cy="152400"/>
           </a:xfrm>
           <a:prstGeom prst="rect">
             <a:avLst/>
@@ -6414,21 +5847,258 @@
                 </a:solidFill>
                 <a:latin typeface="Arial"/>
               </a:rPr>
-              <a:t>Téléphones fixes · 1 %</a:t>
-            </a:r>
-          </a:p>
-        </p:txBody>
-      </p:sp>
-      <p:sp>
-        <p:nvSpPr>
-          <p:cNvPr id="86" name="Rectangle 85"/>
+              <a:t>Visa et titre de séjour · 15 %</a:t>
+            </a:r>
+          </a:p>
+        </p:txBody>
+      </p:sp>
+      <p:sp>
+        <p:nvSpPr>
+          <p:cNvPr id="74" name="Rectangle 73"/>
           <p:cNvSpPr/>
           <p:nvPr/>
         </p:nvSpPr>
         <p:spPr>
           <a:xfrm>
+            <a:off x="8077200" y="5212080"/>
+            <a:ext cx="121920" cy="121920"/>
+          </a:xfrm>
+          <a:prstGeom prst="rect">
+            <a:avLst/>
+          </a:prstGeom>
+          <a:solidFill>
+            <a:srgbClr val="EE6A2C"/>
+          </a:solidFill>
+          <a:ln>
+            <a:noFill/>
+          </a:ln>
+          <a:effectLst/>
+        </p:spPr>
+        <p:style>
+          <a:lnRef idx="1">
+            <a:schemeClr val="accent1"/>
+          </a:lnRef>
+          <a:fillRef idx="3">
+            <a:schemeClr val="accent1"/>
+          </a:fillRef>
+          <a:effectRef idx="2">
+            <a:schemeClr val="accent1"/>
+          </a:effectRef>
+          <a:fontRef idx="minor">
+            <a:schemeClr val="lt1"/>
+          </a:fontRef>
+        </p:style>
+        <p:txBody>
+          <a:bodyPr rtlCol="0" anchor="ctr"/>
+          <a:lstStyle/>
+          <a:p>
+            <a:pPr algn="ctr"/>
+          </a:p>
+        </p:txBody>
+      </p:sp>
+      <p:sp>
+        <p:nvSpPr>
+          <p:cNvPr id="75" name="TextBox 74"/>
+          <p:cNvSpPr txBox="1"/>
+          <p:nvPr/>
+        </p:nvSpPr>
+        <p:spPr>
+          <a:xfrm>
+            <a:off x="8296656" y="5193792"/>
+            <a:ext cx="2225040" cy="152400"/>
+          </a:xfrm>
+          <a:prstGeom prst="rect">
+            <a:avLst/>
+          </a:prstGeom>
+          <a:noFill/>
+        </p:spPr>
+        <p:txBody>
+          <a:bodyPr wrap="square" anchor="t" lIns="0" rIns="0" tIns="0" bIns="0">
+            <a:spAutoFit/>
+          </a:bodyPr>
+          <a:lstStyle/>
+          <a:p>
+            <a:pPr algn="l"/>
+            <a:r>
+              <a:rPr sz="800" b="0" i="0">
+                <a:solidFill>
+                  <a:srgbClr val="111111"/>
+                </a:solidFill>
+                <a:latin typeface="Arial"/>
+              </a:rPr>
+              <a:t>Création et contrôle de conformité · 10 %</a:t>
+            </a:r>
+          </a:p>
+        </p:txBody>
+      </p:sp>
+      <p:sp>
+        <p:nvSpPr>
+          <p:cNvPr id="76" name="Rectangle 75"/>
+          <p:cNvSpPr/>
+          <p:nvPr/>
+        </p:nvSpPr>
+        <p:spPr>
+          <a:xfrm>
+            <a:off x="8077200" y="5480304"/>
+            <a:ext cx="121920" cy="121920"/>
+          </a:xfrm>
+          <a:prstGeom prst="rect">
+            <a:avLst/>
+          </a:prstGeom>
+          <a:solidFill>
+            <a:srgbClr val="3E5A78"/>
+          </a:solidFill>
+          <a:ln>
+            <a:noFill/>
+          </a:ln>
+          <a:effectLst/>
+        </p:spPr>
+        <p:style>
+          <a:lnRef idx="1">
+            <a:schemeClr val="accent1"/>
+          </a:lnRef>
+          <a:fillRef idx="3">
+            <a:schemeClr val="accent1"/>
+          </a:fillRef>
+          <a:effectRef idx="2">
+            <a:schemeClr val="accent1"/>
+          </a:effectRef>
+          <a:fontRef idx="minor">
+            <a:schemeClr val="lt1"/>
+          </a:fontRef>
+        </p:style>
+        <p:txBody>
+          <a:bodyPr rtlCol="0" anchor="ctr"/>
+          <a:lstStyle/>
+          <a:p>
+            <a:pPr algn="ctr"/>
+          </a:p>
+        </p:txBody>
+      </p:sp>
+      <p:sp>
+        <p:nvSpPr>
+          <p:cNvPr id="77" name="TextBox 76"/>
+          <p:cNvSpPr txBox="1"/>
+          <p:nvPr/>
+        </p:nvSpPr>
+        <p:spPr>
+          <a:xfrm>
+            <a:off x="8296656" y="5462016"/>
+            <a:ext cx="2225040" cy="152400"/>
+          </a:xfrm>
+          <a:prstGeom prst="rect">
+            <a:avLst/>
+          </a:prstGeom>
+          <a:noFill/>
+        </p:spPr>
+        <p:txBody>
+          <a:bodyPr wrap="square" anchor="t" lIns="0" rIns="0" tIns="0" bIns="0">
+            <a:spAutoFit/>
+          </a:bodyPr>
+          <a:lstStyle/>
+          <a:p>
+            <a:pPr algn="l"/>
+            <a:r>
+              <a:rPr sz="800" b="0" i="0">
+                <a:solidFill>
+                  <a:srgbClr val="111111"/>
+                </a:solidFill>
+                <a:latin typeface="Arial"/>
+              </a:rPr>
+              <a:t>Photos de bébé, d'enfant et publics empêchés · 5 %</a:t>
+            </a:r>
+          </a:p>
+        </p:txBody>
+      </p:sp>
+      <p:sp>
+        <p:nvSpPr>
+          <p:cNvPr id="78" name="Rectangle 77"/>
+          <p:cNvSpPr/>
+          <p:nvPr/>
+        </p:nvSpPr>
+        <p:spPr>
+          <a:xfrm>
+            <a:off x="8077200" y="5748528"/>
+            <a:ext cx="121920" cy="121920"/>
+          </a:xfrm>
+          <a:prstGeom prst="rect">
+            <a:avLst/>
+          </a:prstGeom>
+          <a:solidFill>
+            <a:srgbClr val="A09278"/>
+          </a:solidFill>
+          <a:ln>
+            <a:noFill/>
+          </a:ln>
+          <a:effectLst/>
+        </p:spPr>
+        <p:style>
+          <a:lnRef idx="1">
+            <a:schemeClr val="accent1"/>
+          </a:lnRef>
+          <a:fillRef idx="3">
+            <a:schemeClr val="accent1"/>
+          </a:fillRef>
+          <a:effectRef idx="2">
+            <a:schemeClr val="accent1"/>
+          </a:effectRef>
+          <a:fontRef idx="minor">
+            <a:schemeClr val="lt1"/>
+          </a:fontRef>
+        </p:style>
+        <p:txBody>
+          <a:bodyPr rtlCol="0" anchor="ctr"/>
+          <a:lstStyle/>
+          <a:p>
+            <a:pPr algn="ctr"/>
+          </a:p>
+        </p:txBody>
+      </p:sp>
+      <p:sp>
+        <p:nvSpPr>
+          <p:cNvPr id="79" name="TextBox 78"/>
+          <p:cNvSpPr txBox="1"/>
+          <p:nvPr/>
+        </p:nvSpPr>
+        <p:spPr>
+          <a:xfrm>
+            <a:off x="8296656" y="5730240"/>
+            <a:ext cx="2225040" cy="152400"/>
+          </a:xfrm>
+          <a:prstGeom prst="rect">
+            <a:avLst/>
+          </a:prstGeom>
+          <a:noFill/>
+        </p:spPr>
+        <p:txBody>
+          <a:bodyPr wrap="square" anchor="t" lIns="0" rIns="0" tIns="0" bIns="0">
+            <a:spAutoFit/>
+          </a:bodyPr>
+          <a:lstStyle/>
+          <a:p>
+            <a:pPr algn="l"/>
+            <a:r>
+              <a:rPr sz="800" b="0" i="0">
+                <a:solidFill>
+                  <a:srgbClr val="111111"/>
+                </a:solidFill>
+                <a:latin typeface="Arial"/>
+              </a:rPr>
+              <a:t>Impression et livraison à domicile · 5 %</a:t>
+            </a:r>
+          </a:p>
+        </p:txBody>
+      </p:sp>
+      <p:sp>
+        <p:nvSpPr>
+          <p:cNvPr id="80" name="Rectangle 79"/>
+          <p:cNvSpPr/>
+          <p:nvPr/>
+        </p:nvSpPr>
+        <p:spPr>
+          <a:xfrm>
             <a:off x="10564368" y="4450080"/>
-            <a:ext cx="475488" cy="1247241"/>
+            <a:ext cx="475488" cy="549859"/>
           </a:xfrm>
           <a:prstGeom prst="rect">
             <a:avLst/>
@@ -6465,14 +6135,14 @@
       </p:sp>
       <p:sp>
         <p:nvSpPr>
-          <p:cNvPr id="87" name="TextBox 86"/>
+          <p:cNvPr id="81" name="TextBox 80"/>
           <p:cNvSpPr txBox="1"/>
           <p:nvPr/>
         </p:nvSpPr>
         <p:spPr>
           <a:xfrm>
             <a:off x="10564368" y="4450080"/>
-            <a:ext cx="475488" cy="1247241"/>
+            <a:ext cx="475488" cy="549859"/>
           </a:xfrm>
           <a:prstGeom prst="rect">
             <a:avLst/>
@@ -6493,21 +6163,21 @@
                 </a:solidFill>
                 <a:latin typeface="Arial"/>
               </a:rPr>
-              <a:t>93 %</a:t>
-            </a:r>
-          </a:p>
-        </p:txBody>
-      </p:sp>
-      <p:sp>
-        <p:nvSpPr>
-          <p:cNvPr id="88" name="Rectangle 87"/>
+              <a:t>41 %</a:t>
+            </a:r>
+          </a:p>
+        </p:txBody>
+      </p:sp>
+      <p:sp>
+        <p:nvSpPr>
+          <p:cNvPr id="82" name="Rectangle 81"/>
           <p:cNvSpPr/>
           <p:nvPr/>
         </p:nvSpPr>
         <p:spPr>
           <a:xfrm>
-            <a:off x="10564368" y="5697321"/>
-            <a:ext cx="475488" cy="80467"/>
+            <a:off x="10564368" y="4999939"/>
+            <a:ext cx="475488" cy="321868"/>
           </a:xfrm>
           <a:prstGeom prst="rect">
             <a:avLst/>
@@ -6544,20 +6214,152 @@
       </p:sp>
       <p:sp>
         <p:nvSpPr>
-          <p:cNvPr id="89" name="Rectangle 88"/>
+          <p:cNvPr id="83" name="Rectangle 82"/>
           <p:cNvSpPr/>
           <p:nvPr/>
         </p:nvSpPr>
         <p:spPr>
           <a:xfrm>
-            <a:off x="10564368" y="5777788"/>
-            <a:ext cx="475488" cy="13411"/>
+            <a:off x="10564368" y="5321808"/>
+            <a:ext cx="475488" cy="201168"/>
           </a:xfrm>
           <a:prstGeom prst="rect">
             <a:avLst/>
           </a:prstGeom>
           <a:solidFill>
             <a:srgbClr val="EB9A5E"/>
+          </a:solidFill>
+          <a:ln>
+            <a:noFill/>
+          </a:ln>
+          <a:effectLst/>
+        </p:spPr>
+        <p:style>
+          <a:lnRef idx="1">
+            <a:schemeClr val="accent1"/>
+          </a:lnRef>
+          <a:fillRef idx="3">
+            <a:schemeClr val="accent1"/>
+          </a:fillRef>
+          <a:effectRef idx="2">
+            <a:schemeClr val="accent1"/>
+          </a:effectRef>
+          <a:fontRef idx="minor">
+            <a:schemeClr val="lt1"/>
+          </a:fontRef>
+        </p:style>
+        <p:txBody>
+          <a:bodyPr rtlCol="0" anchor="ctr"/>
+          <a:lstStyle/>
+          <a:p>
+            <a:pPr algn="ctr"/>
+          </a:p>
+        </p:txBody>
+      </p:sp>
+      <p:sp>
+        <p:nvSpPr>
+          <p:cNvPr id="84" name="Rectangle 83"/>
+          <p:cNvSpPr/>
+          <p:nvPr/>
+        </p:nvSpPr>
+        <p:spPr>
+          <a:xfrm>
+            <a:off x="10564368" y="5522976"/>
+            <a:ext cx="475488" cy="134112"/>
+          </a:xfrm>
+          <a:prstGeom prst="rect">
+            <a:avLst/>
+          </a:prstGeom>
+          <a:solidFill>
+            <a:srgbClr val="EE6A2C"/>
+          </a:solidFill>
+          <a:ln>
+            <a:noFill/>
+          </a:ln>
+          <a:effectLst/>
+        </p:spPr>
+        <p:style>
+          <a:lnRef idx="1">
+            <a:schemeClr val="accent1"/>
+          </a:lnRef>
+          <a:fillRef idx="3">
+            <a:schemeClr val="accent1"/>
+          </a:fillRef>
+          <a:effectRef idx="2">
+            <a:schemeClr val="accent1"/>
+          </a:effectRef>
+          <a:fontRef idx="minor">
+            <a:schemeClr val="lt1"/>
+          </a:fontRef>
+        </p:style>
+        <p:txBody>
+          <a:bodyPr rtlCol="0" anchor="ctr"/>
+          <a:lstStyle/>
+          <a:p>
+            <a:pPr algn="ctr"/>
+          </a:p>
+        </p:txBody>
+      </p:sp>
+      <p:sp>
+        <p:nvSpPr>
+          <p:cNvPr id="85" name="Rectangle 84"/>
+          <p:cNvSpPr/>
+          <p:nvPr/>
+        </p:nvSpPr>
+        <p:spPr>
+          <a:xfrm>
+            <a:off x="10564368" y="5657088"/>
+            <a:ext cx="475488" cy="67056"/>
+          </a:xfrm>
+          <a:prstGeom prst="rect">
+            <a:avLst/>
+          </a:prstGeom>
+          <a:solidFill>
+            <a:srgbClr val="3E5A78"/>
+          </a:solidFill>
+          <a:ln>
+            <a:noFill/>
+          </a:ln>
+          <a:effectLst/>
+        </p:spPr>
+        <p:style>
+          <a:lnRef idx="1">
+            <a:schemeClr val="accent1"/>
+          </a:lnRef>
+          <a:fillRef idx="3">
+            <a:schemeClr val="accent1"/>
+          </a:fillRef>
+          <a:effectRef idx="2">
+            <a:schemeClr val="accent1"/>
+          </a:effectRef>
+          <a:fontRef idx="minor">
+            <a:schemeClr val="lt1"/>
+          </a:fontRef>
+        </p:style>
+        <p:txBody>
+          <a:bodyPr rtlCol="0" anchor="ctr"/>
+          <a:lstStyle/>
+          <a:p>
+            <a:pPr algn="ctr"/>
+          </a:p>
+        </p:txBody>
+      </p:sp>
+      <p:sp>
+        <p:nvSpPr>
+          <p:cNvPr id="86" name="Rectangle 85"/>
+          <p:cNvSpPr/>
+          <p:nvPr/>
+        </p:nvSpPr>
+        <p:spPr>
+          <a:xfrm>
+            <a:off x="10564368" y="5724144"/>
+            <a:ext cx="475488" cy="67056"/>
+          </a:xfrm>
+          <a:prstGeom prst="rect">
+            <a:avLst/>
+          </a:prstGeom>
+          <a:solidFill>
+            <a:srgbClr val="A09278"/>
           </a:solidFill>
           <a:ln>
             <a:noFill/>
@@ -6987,7 +6789,7 @@
                 </a:solidFill>
                 <a:latin typeface="Arial"/>
               </a:rPr>
-              <a:t>Être là au moment du remplacement</a:t>
+              <a:t>À compléter</a:t>
             </a:r>
           </a:p>
         </p:txBody>
@@ -7022,7 +6824,7 @@
                 </a:solidFill>
                 <a:latin typeface="Arial"/>
               </a:rPr>
-              <a:t>L'équipement d'un enfant (29,9 %), l'achat d'un smartphone (17,8 %) et le remplacement après panne (17,7 %) déclenchent les conversations.</a:t>
+              <a:t>Le rapport d'insights de septembre porte sur un autre secteur (smartphones reconditionnés) : insight à rédiger à partir d'un rapport sur la photo d'identité.</a:t>
             </a:r>
           </a:p>
         </p:txBody>
@@ -7057,7 +6859,7 @@
                 </a:solidFill>
                 <a:latin typeface="Arial"/>
               </a:rPr>
-              <a:t>→  Cibler les messages « remplacement rapide » et « premier smartphone pour votre enfant ».</a:t>
+              <a:t>→  À compléter.</a:t>
             </a:r>
           </a:p>
         </p:txBody>
@@ -7173,7 +6975,7 @@
                 </a:solidFill>
                 <a:latin typeface="Arial"/>
               </a:rPr>
-              <a:t>Rassurer sur la fiabilité du reconditionné</a:t>
+              <a:t>À compléter</a:t>
             </a:r>
           </a:p>
         </p:txBody>
@@ -7208,7 +7010,7 @@
                 </a:solidFill>
                 <a:latin typeface="Arial"/>
               </a:rPr>
-              <a:t>La fiabilité (16,5 %) et le prix (16,5 %) font partie des premiers freins, avec des questions directes sur les iPhone reconditionnés.</a:t>
+              <a:t>Rapport d'insights à refaire sur le bon secteur.</a:t>
             </a:r>
           </a:p>
         </p:txBody>
@@ -7243,7 +7045,7 @@
                 </a:solidFill>
                 <a:latin typeface="Arial"/>
               </a:rPr>
-              <a:t>→  Mettre en avant la garantie, les tests réalisés et l'état du produit dans chaque accroche.</a:t>
+              <a:t>→  À compléter.</a:t>
             </a:r>
           </a:p>
         </p:txBody>
@@ -7359,7 +7161,7 @@
                 </a:solidFill>
                 <a:latin typeface="Arial"/>
               </a:rPr>
-              <a:t>Gagner en notoriété face aux grandes plateformes</a:t>
+              <a:t>À compléter</a:t>
             </a:r>
           </a:p>
         </p:txBody>
@@ -7394,7 +7196,7 @@
                 </a:solidFill>
                 <a:latin typeface="Arial"/>
               </a:rPr>
-              <a:t>Smartphone ID reste sous 0,1 % de part de voix, face à Back Market (30,4 %) et Amazon (29,8 %). Côté ads : 10,4 % (−0,6 pt).</a:t>
+              <a:t>Rapport d'insights à refaire sur le bon secteur.</a:t>
             </a:r>
           </a:p>
         </p:txBody>
@@ -7429,7 +7231,7 @@
                 </a:solidFill>
                 <a:latin typeface="Arial"/>
               </a:rPr>
-              <a:t>→  Maintenir la présence ads et travailler la marque (avis clients, garantie) pour être cité spontanément.</a:t>
+              <a:t>→  À compléter.</a:t>
             </a:r>
           </a:p>
         </p:txBody>

--- a/rapports/septembre/Smartphone_ID_sept2026.pptx
+++ b/rapports/septembre/Smartphone_ID_sept2026.pptx
@@ -6789,7 +6789,7 @@
                 </a:solidFill>
                 <a:latin typeface="Arial"/>
               </a:rPr>
-              <a:t>À compléter</a:t>
+              <a:t>Une promesse simple qui fonctionne</a:t>
             </a:r>
           </a:p>
         </p:txBody>
@@ -6824,7 +6824,7 @@
                 </a:solidFill>
                 <a:latin typeface="Arial"/>
               </a:rPr>
-              <a:t>Le rapport d'insights de septembre porte sur un autre secteur (smartphones reconditionnés) : insight à rédiger à partir d'un rapport sur la photo d'identité.</a:t>
+              <a:t>L'annonce « Photo d'identité en ligne en 2 minutes » génère 1 240 clics. Le CTR passe de 0,21 % à 0,52 %.</a:t>
             </a:r>
           </a:p>
         </p:txBody>
@@ -6859,7 +6859,7 @@
                 </a:solidFill>
                 <a:latin typeface="Arial"/>
               </a:rPr>
-              <a:t>→  À compléter.</a:t>
+              <a:t>→  Garder la rapidité et la conformité comme arguments principaux.</a:t>
             </a:r>
           </a:p>
         </p:txBody>
@@ -6975,7 +6975,7 @@
                 </a:solidFill>
                 <a:latin typeface="Arial"/>
               </a:rPr>
-              <a:t>À compléter</a:t>
+              <a:t>Une seule accroche diffusée</a:t>
             </a:r>
           </a:p>
         </p:txBody>
@@ -7010,7 +7010,7 @@
                 </a:solidFill>
                 <a:latin typeface="Arial"/>
               </a:rPr>
-              <a:t>Rapport d'insights à refaire sur le bon secteur.</a:t>
+              <a:t>Les 2 annonces diffusées portent le même message et obtiennent le même CTR (0,98 à 1,02 fois la moyenne).</a:t>
             </a:r>
           </a:p>
         </p:txBody>
@@ -7045,7 +7045,7 @@
                 </a:solidFill>
                 <a:latin typeface="Arial"/>
               </a:rPr>
-              <a:t>→  À compléter.</a:t>
+              <a:t>→  Ajouter des annonces par démarche (passeport, permis ANTS, visa, photo de bébé) pour identifier celles qui cliquent le plus.</a:t>
             </a:r>
           </a:p>
         </p:txBody>
@@ -7196,7 +7196,7 @@
                 </a:solidFill>
                 <a:latin typeface="Arial"/>
               </a:rPr>
-              <a:t>Rapport d'insights à refaire sur le bon secteur.</a:t>
+              <a:t>Le rapport d'insights de septembre porte sur un autre secteur (smartphones reconditionnés).</a:t>
             </a:r>
           </a:p>
         </p:txBody>
@@ -7231,7 +7231,7 @@
                 </a:solidFill>
                 <a:latin typeface="Arial"/>
               </a:rPr>
-              <a:t>→  À compléter.</a:t>
+              <a:t>→  À compléter avec un rapport sur la photo d'identité.</a:t>
             </a:r>
           </a:p>
         </p:txBody>
@@ -7347,7 +7347,7 @@
                 </a:solidFill>
                 <a:latin typeface="Arial"/>
               </a:rPr>
-              <a:t>Le CTR fait plus que doubler</a:t>
+              <a:t>Moins d'impressions, plus de clics</a:t>
             </a:r>
           </a:p>
         </p:txBody>
@@ -7382,7 +7382,7 @@
                 </a:solidFill>
                 <a:latin typeface="Arial"/>
               </a:rPr>
-              <a:t>Les clics passent de 653 à 1 240 (+90 %) malgré 24 % d'impressions en moins. Le CTR passe de 0,21 % à 0,52 %.</a:t>
+              <a:t>Les impressions baissent de 24 % mais les clics progressent de 90 %.</a:t>
             </a:r>
           </a:p>
         </p:txBody>
@@ -7417,7 +7417,7 @@
                 </a:solidFill>
                 <a:latin typeface="Arial"/>
               </a:rPr>
-              <a:t>→  Poursuivre sur les modèles les plus recherchés : iPhone, Galaxy S, Redmi.</a:t>
+              <a:t>→  Définir un objectif de campagne (photos réalisées, téléchargements, CPA cible).</a:t>
             </a:r>
           </a:p>
         </p:txBody>
